--- a/mayis-cedes-pano.pptx
+++ b/mayis-cedes-pano.pptx
@@ -1163,6 +1163,10 @@
           </a:solidFill>
           <a:ln/>
         </p:spPr>
+        <p:txBody>
+          <a:bodyPr/>
+          <a:p/>
+        </p:txBody>
       </p:sp>
       <p:sp>
         <p:nvSpPr>
@@ -1185,6 +1189,10 @@
           </a:solidFill>
           <a:ln/>
         </p:spPr>
+        <p:txBody>
+          <a:bodyPr/>
+          <a:p/>
+        </p:txBody>
       </p:sp>
       <p:sp>
         <p:nvSpPr>
@@ -1258,7 +1266,7 @@
                 <a:ea typeface="Calibri" pitchFamily="34" charset="-122"/>
                 <a:cs typeface="Calibri" pitchFamily="34" charset="-120"/>
               </a:rPr>
-              <a:t>MAYIS AYI  •  AİLE BÜTÜNLÜĞÜ • MAHREMİYET</a:t>
+              <a:t>MAYIS AYI  •  ESTETİK • MÜTEVAZILIK</a:t>
             </a:r>
             <a:endParaRPr lang="en-US" sz="2000" dirty="0"/>
           </a:p>
@@ -1294,7 +1302,7 @@
                   <a:srgbClr val="FFFFFF"/>
                 </a:solidFill>
               </a:rPr>
-              <a:t>2025 - 2026 Eğitim Öğretim Yılı</a:t>
+              <a:t>2026 - 2027 Eğitim Öğretim Yılı</a:t>
             </a:r>
             <a:endParaRPr lang="en-US" sz="1600" dirty="0"/>
           </a:p>
@@ -1309,376 +1317,6 @@
 </file>
 
 <file path=ppt/slides/slide2.xml><?xml version="1.0" encoding="utf-8"?>
-<p:sld xmlns:a="http://schemas.openxmlformats.org/drawingml/2006/main" xmlns:r="http://schemas.openxmlformats.org/officeDocument/2006/relationships" xmlns:p="http://schemas.openxmlformats.org/presentationml/2006/main">
-  <p:cSld name="Slide 2">
-    <p:bg>
-      <p:bgPr>
-        <a:solidFill>
-          <a:srgbClr val="FFFFFF"/>
-        </a:solidFill>
-      </p:bgPr>
-    </p:bg>
-    <p:spTree>
-      <p:nvGrpSpPr>
-        <p:cNvPr id="1" name=""/>
-        <p:cNvGrpSpPr/>
-        <p:nvPr/>
-      </p:nvGrpSpPr>
-      <p:grpSpPr>
-        <a:xfrm>
-          <a:off x="0" y="0"/>
-          <a:ext cx="0" cy="0"/>
-          <a:chOff x="0" y="0"/>
-          <a:chExt cx="0" cy="0"/>
-        </a:xfrm>
-      </p:grpSpPr>
-      <p:sp>
-        <p:nvSpPr>
-          <p:cNvPr id="2" name="Shape 0"/>
-          <p:cNvSpPr/>
-          <p:nvPr/>
-        </p:nvSpPr>
-        <p:spPr>
-          <a:xfrm>
-            <a:off x="0" y="0"/>
-            <a:ext cx="3840480" cy="6858000"/>
-          </a:xfrm>
-          <a:prstGeom prst="rect">
-            <a:avLst/>
-          </a:prstGeom>
-          <a:solidFill>
-            <a:srgbClr val="84B59F"/>
-          </a:solidFill>
-          <a:ln/>
-        </p:spPr>
-      </p:sp>
-      <p:sp>
-        <p:nvSpPr>
-          <p:cNvPr id="3" name="Text 1"/>
-          <p:cNvSpPr/>
-          <p:nvPr/>
-        </p:nvSpPr>
-        <p:spPr>
-          <a:xfrm>
-            <a:off x="274320" y="457200"/>
-            <a:ext cx="3291840" cy="1645920"/>
-          </a:xfrm>
-          <a:prstGeom prst="rect">
-            <a:avLst/>
-          </a:prstGeom>
-          <a:noFill/>
-          <a:ln/>
-        </p:spPr>
-        <p:txBody>
-          <a:bodyPr wrap="square" rtlCol="0" anchor="ctr"/>
-          <a:lstStyle/>
-          <a:p>
-            <a:pPr algn="ctr" indent="0" marL="0">
-              <a:buNone/>
-            </a:pPr>
-            <a:r>
-              <a:rPr lang="en-US" sz="8000" dirty="0">
-                <a:solidFill>
-                  <a:srgbClr val="000000"/>
-                </a:solidFill>
-              </a:rPr>
-              <a:t>🏡</a:t>
-            </a:r>
-            <a:endParaRPr lang="en-US" sz="8000" dirty="0"/>
-          </a:p>
-        </p:txBody>
-      </p:sp>
-      <p:sp>
-        <p:nvSpPr>
-          <p:cNvPr id="4" name="Text 2"/>
-          <p:cNvSpPr/>
-          <p:nvPr/>
-        </p:nvSpPr>
-        <p:spPr>
-          <a:xfrm>
-            <a:off x="274320" y="2194560"/>
-            <a:ext cx="3291840" cy="914400"/>
-          </a:xfrm>
-          <a:prstGeom prst="rect">
-            <a:avLst/>
-          </a:prstGeom>
-          <a:noFill/>
-          <a:ln/>
-        </p:spPr>
-        <p:txBody>
-          <a:bodyPr wrap="square" rtlCol="0" anchor="ctr"/>
-          <a:lstStyle/>
-          <a:p>
-            <a:pPr algn="ctr" indent="0" marL="0">
-              <a:buNone/>
-            </a:pPr>
-            <a:r>
-              <a:rPr lang="en-US" sz="2600" b="1" dirty="0">
-                <a:solidFill>
-                  <a:srgbClr val="FFFFFF"/>
-                </a:solidFill>
-                <a:latin typeface="Cambria" pitchFamily="34" charset="0"/>
-                <a:ea typeface="Cambria" pitchFamily="34" charset="-122"/>
-                <a:cs typeface="Cambria" pitchFamily="34" charset="-120"/>
-              </a:rPr>
-              <a:t>AİLE BÜTÜNLÜĞÜ</a:t>
-            </a:r>
-            <a:endParaRPr lang="en-US" sz="2600" dirty="0"/>
-          </a:p>
-        </p:txBody>
-      </p:sp>
-      <p:sp>
-        <p:nvSpPr>
-          <p:cNvPr id="5" name="Text 3"/>
-          <p:cNvSpPr/>
-          <p:nvPr/>
-        </p:nvSpPr>
-        <p:spPr>
-          <a:xfrm>
-            <a:off x="274320" y="3017520"/>
-            <a:ext cx="3291840" cy="1280160"/>
-          </a:xfrm>
-          <a:prstGeom prst="rect">
-            <a:avLst/>
-          </a:prstGeom>
-          <a:noFill/>
-          <a:ln/>
-        </p:spPr>
-        <p:txBody>
-          <a:bodyPr wrap="square" rtlCol="0" anchor="ctr"/>
-          <a:lstStyle/>
-          <a:p>
-            <a:pPr algn="ctr" indent="0" marL="0">
-              <a:buNone/>
-            </a:pPr>
-            <a:r>
-              <a:rPr lang="en-US" sz="1500" i="1" dirty="0">
-                <a:solidFill>
-                  <a:srgbClr val="FFFFFF"/>
-                </a:solidFill>
-              </a:rPr>
-              <a:t>Ailece Birlik Olmak</a:t>
-            </a:r>
-            <a:endParaRPr lang="en-US" sz="1500" dirty="0"/>
-          </a:p>
-        </p:txBody>
-      </p:sp>
-      <p:sp>
-        <p:nvSpPr>
-          <p:cNvPr id="6" name="Shape 4"/>
-          <p:cNvSpPr/>
-          <p:nvPr/>
-        </p:nvSpPr>
-        <p:spPr>
-          <a:xfrm>
-            <a:off x="548640" y="4846320"/>
-            <a:ext cx="2743200" cy="1280160"/>
-          </a:xfrm>
-          <a:prstGeom prst="roundRect">
-            <a:avLst>
-              <a:gd name="adj" fmla="val 7143"/>
-            </a:avLst>
-          </a:prstGeom>
-          <a:solidFill>
-            <a:srgbClr val="FFFFFF">
-              <a:alpha val="85000"/>
-            </a:srgbClr>
-          </a:solidFill>
-          <a:ln/>
-        </p:spPr>
-      </p:sp>
-      <p:sp>
-        <p:nvSpPr>
-          <p:cNvPr id="7" name="Text 5"/>
-          <p:cNvSpPr/>
-          <p:nvPr/>
-        </p:nvSpPr>
-        <p:spPr>
-          <a:xfrm>
-            <a:off x="548640" y="4846320"/>
-            <a:ext cx="2743200" cy="1280160"/>
-          </a:xfrm>
-          <a:prstGeom prst="rect">
-            <a:avLst/>
-          </a:prstGeom>
-          <a:noFill/>
-          <a:ln/>
-        </p:spPr>
-        <p:txBody>
-          <a:bodyPr wrap="square" rtlCol="0" anchor="ctr"/>
-          <a:lstStyle/>
-          <a:p>
-            <a:pPr algn="ctr" indent="0" marL="0">
-              <a:buNone/>
-            </a:pPr>
-            <a:r>
-              <a:rPr lang="en-US" sz="1600" b="1" dirty="0">
-                <a:solidFill>
-                  <a:srgbClr val="2B2B2B"/>
-                </a:solidFill>
-              </a:rPr>
-              <a:t>1. HAFTA</a:t>
-            </a:r>
-            <a:endParaRPr lang="en-US" sz="1600" dirty="0"/>
-          </a:p>
-          <a:p>
-            <a:pPr algn="ctr" indent="0" marL="0">
-              <a:buNone/>
-            </a:pPr>
-            <a:r>
-              <a:rPr lang="en-US" sz="1600" b="1" dirty="0">
-                <a:solidFill>
-                  <a:srgbClr val="2B2B2B"/>
-                </a:solidFill>
-              </a:rPr>
-              <a:t>04 - 08 Mayıs</a:t>
-            </a:r>
-            <a:endParaRPr lang="en-US" sz="1600" dirty="0"/>
-          </a:p>
-        </p:txBody>
-      </p:sp>
-      <p:sp>
-        <p:nvSpPr>
-          <p:cNvPr id="8" name="Text 6"/>
-          <p:cNvSpPr/>
-          <p:nvPr/>
-        </p:nvSpPr>
-        <p:spPr>
-          <a:xfrm>
-            <a:off x="4206240" y="457200"/>
-            <a:ext cx="7498080" cy="1188720"/>
-          </a:xfrm>
-          <a:prstGeom prst="rect">
-            <a:avLst/>
-          </a:prstGeom>
-          <a:noFill/>
-          <a:ln/>
-        </p:spPr>
-        <p:txBody>
-          <a:bodyPr wrap="square" rtlCol="0" anchor="ctr"/>
-          <a:lstStyle/>
-          <a:p>
-            <a:pPr indent="0" marL="0">
-              <a:buNone/>
-            </a:pPr>
-            <a:r>
-              <a:rPr lang="en-US" sz="2200" b="1" i="1" dirty="0">
-                <a:solidFill>
-                  <a:srgbClr val="50808E"/>
-                </a:solidFill>
-                <a:latin typeface="Cambria" pitchFamily="34" charset="0"/>
-                <a:ea typeface="Cambria" pitchFamily="34" charset="-122"/>
-                <a:cs typeface="Cambria" pitchFamily="34" charset="-120"/>
-              </a:rPr>
-              <a:t>"Küçük anlar, aileyi birbirine bağlayan en güçlü iplerdir."</a:t>
-            </a:r>
-            <a:endParaRPr lang="en-US" sz="2200" dirty="0"/>
-          </a:p>
-        </p:txBody>
-      </p:sp>
-      <p:sp>
-        <p:nvSpPr>
-          <p:cNvPr id="9" name="Text 7"/>
-          <p:cNvSpPr/>
-          <p:nvPr/>
-        </p:nvSpPr>
-        <p:spPr>
-          <a:xfrm>
-            <a:off x="4206240" y="1828800"/>
-            <a:ext cx="7498080" cy="4389120"/>
-          </a:xfrm>
-          <a:prstGeom prst="rect">
-            <a:avLst/>
-          </a:prstGeom>
-          <a:noFill/>
-          <a:ln/>
-        </p:spPr>
-        <p:txBody>
-          <a:bodyPr wrap="square" rtlCol="0" anchor="ctr"/>
-          <a:lstStyle/>
-          <a:p>
-            <a:pPr marL="342900" indent="-342900">
-              <a:spcAft>
-                <a:spcPts val="1200"/>
-              </a:spcAft>
-              <a:buSzPct val="100000"/>
-              <a:buChar char="•"/>
-            </a:pPr>
-            <a:r>
-              <a:rPr lang="en-US" sz="1700" dirty="0">
-                <a:solidFill>
-                  <a:srgbClr val="2B2B2B"/>
-                </a:solidFill>
-              </a:rPr>
-              <a:t>Ailemizle birlikte vakit geçirmeye özen gösteririz.</a:t>
-            </a:r>
-            <a:endParaRPr lang="en-US" sz="1700" dirty="0"/>
-          </a:p>
-          <a:p>
-            <a:pPr marL="342900" indent="-342900">
-              <a:spcAft>
-                <a:spcPts val="1200"/>
-              </a:spcAft>
-              <a:buSzPct val="100000"/>
-              <a:buChar char="•"/>
-            </a:pPr>
-            <a:r>
-              <a:rPr lang="en-US" sz="1700" dirty="0">
-                <a:solidFill>
-                  <a:srgbClr val="2B2B2B"/>
-                </a:solidFill>
-              </a:rPr>
-              <a:t>Birbirimizi dinler, destek oluruz.</a:t>
-            </a:r>
-            <a:endParaRPr lang="en-US" sz="1700" dirty="0"/>
-          </a:p>
-          <a:p>
-            <a:pPr marL="342900" indent="-342900">
-              <a:spcAft>
-                <a:spcPts val="1200"/>
-              </a:spcAft>
-              <a:buSzPct val="100000"/>
-              <a:buChar char="•"/>
-            </a:pPr>
-            <a:r>
-              <a:rPr lang="en-US" sz="1700" dirty="0">
-                <a:solidFill>
-                  <a:srgbClr val="2B2B2B"/>
-                </a:solidFill>
-              </a:rPr>
-              <a:t>Aile içi görevleri paylaşırız.</a:t>
-            </a:r>
-            <a:endParaRPr lang="en-US" sz="1700" dirty="0"/>
-          </a:p>
-          <a:p>
-            <a:pPr marL="342900" indent="-342900">
-              <a:spcAft>
-                <a:spcPts val="1200"/>
-              </a:spcAft>
-              <a:buSzPct val="100000"/>
-              <a:buChar char="•"/>
-            </a:pPr>
-            <a:r>
-              <a:rPr lang="en-US" sz="1700" dirty="0">
-                <a:solidFill>
-                  <a:srgbClr val="2B2B2B"/>
-                </a:solidFill>
-              </a:rPr>
-              <a:t>Sevgi ve saygı aileyi güçlü kılar.</a:t>
-            </a:r>
-            <a:endParaRPr lang="en-US" sz="1700" dirty="0"/>
-          </a:p>
-        </p:txBody>
-      </p:sp>
-    </p:spTree>
-  </p:cSld>
-  <p:clrMapOvr>
-    <a:masterClrMapping/>
-  </p:clrMapOvr>
-</p:sld>
-</file>
-
-<file path=ppt/slides/slide3.xml><?xml version="1.0" encoding="utf-8"?>
 <p:sld xmlns:a="http://schemas.openxmlformats.org/drawingml/2006/main" xmlns:r="http://schemas.openxmlformats.org/officeDocument/2006/relationships" xmlns:p="http://schemas.openxmlformats.org/presentationml/2006/main">
   <p:cSld name="Slide 3">
     <p:bg>
@@ -1717,10 +1355,14 @@
             <a:avLst/>
           </a:prstGeom>
           <a:solidFill>
-            <a:srgbClr val="84B59F"/>
+            <a:srgbClr val="F96167"/>
           </a:solidFill>
           <a:ln/>
         </p:spPr>
+        <p:txBody>
+          <a:bodyPr/>
+          <a:p/>
+        </p:txBody>
       </p:sp>
       <p:sp>
         <p:nvSpPr>
@@ -1752,7 +1394,7 @@
                   <a:srgbClr val="000000"/>
                 </a:solidFill>
               </a:rPr>
-              <a:t>🔒</a:t>
+              <a:t>🎨</a:t>
             </a:r>
             <a:endParaRPr lang="en-US" sz="8000" dirty="0"/>
           </a:p>
@@ -1791,7 +1433,7 @@
                 <a:ea typeface="Cambria" pitchFamily="34" charset="-122"/>
                 <a:cs typeface="Cambria" pitchFamily="34" charset="-120"/>
               </a:rPr>
-              <a:t>MAHREMİYET</a:t>
+              <a:t>ESTETİK</a:t>
             </a:r>
             <a:endParaRPr lang="en-US" sz="2600" dirty="0"/>
           </a:p>
@@ -1827,7 +1469,7 @@
                   <a:srgbClr val="FFFFFF"/>
                 </a:solidFill>
               </a:rPr>
-              <a:t>Kendine ve Başkalarına Ait Sınırlar</a:t>
+              <a:t>Güzeli Görmek ve Yaratmak</a:t>
             </a:r>
             <a:endParaRPr lang="en-US" sz="1500" dirty="0"/>
           </a:p>
@@ -1856,6 +1498,10 @@
           </a:solidFill>
           <a:ln/>
         </p:spPr>
+        <p:txBody>
+          <a:bodyPr/>
+          <a:p/>
+        </p:txBody>
       </p:sp>
       <p:sp>
         <p:nvSpPr>
@@ -1887,7 +1533,7 @@
                   <a:srgbClr val="2B2B2B"/>
                 </a:solidFill>
               </a:rPr>
-              <a:t>2. HAFTA</a:t>
+              <a:t>28 ve 29. HAFTA</a:t>
             </a:r>
             <a:endParaRPr lang="en-US" sz="1600" dirty="0"/>
           </a:p>
@@ -1901,7 +1547,7 @@
                   <a:srgbClr val="2B2B2B"/>
                 </a:solidFill>
               </a:rPr>
-              <a:t>11 - 15 Mayıs</a:t>
+              <a:t>3 – 14 Mayıs</a:t>
             </a:r>
             <a:endParaRPr lang="en-US" sz="1600" dirty="0"/>
           </a:p>
@@ -1934,13 +1580,13 @@
             <a:r>
               <a:rPr lang="en-US" sz="2200" b="1" i="1" dirty="0">
                 <a:solidFill>
-                  <a:srgbClr val="50808E"/>
+                  <a:srgbClr val="2F3C7E"/>
                 </a:solidFill>
                 <a:latin typeface="Cambria" pitchFamily="34" charset="0"/>
                 <a:ea typeface="Cambria" pitchFamily="34" charset="-122"/>
                 <a:cs typeface="Cambria" pitchFamily="34" charset="-120"/>
               </a:rPr>
-              <a:t>"Herkesin özel alanına saygı göstermek, mahremiyete değer vermektir."</a:t>
+              <a:t>"Güzeli görmek, güzeli yaratmanın ilk adımıdır."</a:t>
             </a:r>
             <a:endParaRPr lang="en-US" sz="2200" dirty="0"/>
           </a:p>
@@ -1980,7 +1626,7 @@
                   <a:srgbClr val="2B2B2B"/>
                 </a:solidFill>
               </a:rPr>
-              <a:t>Başkasının eşyasını izinsiz kullanmayız.</a:t>
+              <a:t>Etrafımızdaki güzellikleri fark etmeye çalışırız.</a:t>
             </a:r>
             <a:endParaRPr lang="en-US" sz="1700" dirty="0"/>
           </a:p>
@@ -1998,7 +1644,7 @@
                   <a:srgbClr val="2B2B2B"/>
                 </a:solidFill>
               </a:rPr>
-              <a:t>Kapalı kapıyı çalmadan açmayız.</a:t>
+              <a:t>Küçük bir emekle sıradan eşyalar özel olabilir.</a:t>
             </a:r>
             <a:endParaRPr lang="en-US" sz="1700" dirty="0"/>
           </a:p>
@@ -2016,7 +1662,7 @@
                   <a:srgbClr val="2B2B2B"/>
                 </a:solidFill>
               </a:rPr>
-              <a:t>Vücudumuz bize aittir, sınırlarımızı biliriz.</a:t>
+              <a:t>Temiz ve düzenli bir ortam da estetiğin parçasıdır.</a:t>
             </a:r>
             <a:endParaRPr lang="en-US" sz="1700" dirty="0"/>
           </a:p>
@@ -2034,7 +1680,385 @@
                   <a:srgbClr val="2B2B2B"/>
                 </a:solidFill>
               </a:rPr>
-              <a:t>Rahatsız eden bir duruma 'hayır' diyebiliriz.</a:t>
+              <a:t>Sanat, güzeli ifade etmenin bir yoludur.</a:t>
+            </a:r>
+            <a:endParaRPr lang="en-US" sz="1700" dirty="0"/>
+          </a:p>
+        </p:txBody>
+      </p:sp>
+    </p:spTree>
+  </p:cSld>
+  <p:clrMapOvr>
+    <a:masterClrMapping/>
+  </p:clrMapOvr>
+</p:sld>
+</file>
+
+<file path=ppt/slides/slide3.xml><?xml version="1.0" encoding="utf-8"?>
+<p:sld xmlns:a="http://schemas.openxmlformats.org/drawingml/2006/main" xmlns:r="http://schemas.openxmlformats.org/officeDocument/2006/relationships" xmlns:p="http://schemas.openxmlformats.org/presentationml/2006/main">
+  <p:cSld name="Slide 4">
+    <p:bg>
+      <p:bgPr>
+        <a:solidFill>
+          <a:srgbClr val="FFFFFF"/>
+        </a:solidFill>
+      </p:bgPr>
+    </p:bg>
+    <p:spTree>
+      <p:nvGrpSpPr>
+        <p:cNvPr id="1" name=""/>
+        <p:cNvGrpSpPr/>
+        <p:nvPr/>
+      </p:nvGrpSpPr>
+      <p:grpSpPr>
+        <a:xfrm>
+          <a:off x="0" y="0"/>
+          <a:ext cx="0" cy="0"/>
+          <a:chOff x="0" y="0"/>
+          <a:chExt cx="0" cy="0"/>
+        </a:xfrm>
+      </p:grpSpPr>
+      <p:sp>
+        <p:nvSpPr>
+          <p:cNvPr id="2" name="Shape 0"/>
+          <p:cNvSpPr/>
+          <p:nvPr/>
+        </p:nvSpPr>
+        <p:spPr>
+          <a:xfrm>
+            <a:off x="0" y="0"/>
+            <a:ext cx="3840480" cy="6858000"/>
+          </a:xfrm>
+          <a:prstGeom prst="rect">
+            <a:avLst/>
+          </a:prstGeom>
+          <a:solidFill>
+            <a:srgbClr val="F96167"/>
+          </a:solidFill>
+          <a:ln/>
+        </p:spPr>
+        <p:txBody>
+          <a:bodyPr/>
+          <a:p/>
+        </p:txBody>
+      </p:sp>
+      <p:sp>
+        <p:nvSpPr>
+          <p:cNvPr id="3" name="Text 1"/>
+          <p:cNvSpPr/>
+          <p:nvPr/>
+        </p:nvSpPr>
+        <p:spPr>
+          <a:xfrm>
+            <a:off x="274320" y="457200"/>
+            <a:ext cx="3291840" cy="1645920"/>
+          </a:xfrm>
+          <a:prstGeom prst="rect">
+            <a:avLst/>
+          </a:prstGeom>
+          <a:noFill/>
+          <a:ln/>
+        </p:spPr>
+        <p:txBody>
+          <a:bodyPr wrap="square" rtlCol="0" anchor="ctr"/>
+          <a:lstStyle/>
+          <a:p>
+            <a:pPr algn="ctr" indent="0" marL="0">
+              <a:buNone/>
+            </a:pPr>
+            <a:r>
+              <a:rPr lang="en-US" sz="8000" dirty="0">
+                <a:solidFill>
+                  <a:srgbClr val="000000"/>
+                </a:solidFill>
+              </a:rPr>
+              <a:t>🌾</a:t>
+            </a:r>
+            <a:endParaRPr lang="en-US" sz="8000" dirty="0"/>
+          </a:p>
+        </p:txBody>
+      </p:sp>
+      <p:sp>
+        <p:nvSpPr>
+          <p:cNvPr id="4" name="Text 2"/>
+          <p:cNvSpPr/>
+          <p:nvPr/>
+        </p:nvSpPr>
+        <p:spPr>
+          <a:xfrm>
+            <a:off x="274320" y="2194560"/>
+            <a:ext cx="3291840" cy="914400"/>
+          </a:xfrm>
+          <a:prstGeom prst="rect">
+            <a:avLst/>
+          </a:prstGeom>
+          <a:noFill/>
+          <a:ln/>
+        </p:spPr>
+        <p:txBody>
+          <a:bodyPr wrap="square" rtlCol="0" anchor="ctr"/>
+          <a:lstStyle/>
+          <a:p>
+            <a:pPr algn="ctr" indent="0" marL="0">
+              <a:buNone/>
+            </a:pPr>
+            <a:r>
+              <a:rPr lang="en-US" sz="2600" b="1" dirty="0">
+                <a:solidFill>
+                  <a:srgbClr val="FFFFFF"/>
+                </a:solidFill>
+                <a:latin typeface="Cambria" pitchFamily="34" charset="0"/>
+                <a:ea typeface="Cambria" pitchFamily="34" charset="-122"/>
+                <a:cs typeface="Cambria" pitchFamily="34" charset="-120"/>
+              </a:rPr>
+              <a:t>MÜTEVAZILIK</a:t>
+            </a:r>
+            <a:endParaRPr lang="en-US" sz="2600" dirty="0"/>
+          </a:p>
+        </p:txBody>
+      </p:sp>
+      <p:sp>
+        <p:nvSpPr>
+          <p:cNvPr id="5" name="Text 3"/>
+          <p:cNvSpPr/>
+          <p:nvPr/>
+        </p:nvSpPr>
+        <p:spPr>
+          <a:xfrm>
+            <a:off x="274320" y="3017520"/>
+            <a:ext cx="3291840" cy="1280160"/>
+          </a:xfrm>
+          <a:prstGeom prst="rect">
+            <a:avLst/>
+          </a:prstGeom>
+          <a:noFill/>
+          <a:ln/>
+        </p:spPr>
+        <p:txBody>
+          <a:bodyPr wrap="square" rtlCol="0" anchor="ctr"/>
+          <a:lstStyle/>
+          <a:p>
+            <a:pPr algn="ctr" indent="0" marL="0">
+              <a:buNone/>
+            </a:pPr>
+            <a:r>
+              <a:rPr lang="en-US" sz="1500" i="1" dirty="0">
+                <a:solidFill>
+                  <a:srgbClr val="FFFFFF"/>
+                </a:solidFill>
+              </a:rPr>
+              <a:t>Övünmeden Paylaşmak</a:t>
+            </a:r>
+            <a:endParaRPr lang="en-US" sz="1500" dirty="0"/>
+          </a:p>
+        </p:txBody>
+      </p:sp>
+      <p:sp>
+        <p:nvSpPr>
+          <p:cNvPr id="6" name="Shape 4"/>
+          <p:cNvSpPr/>
+          <p:nvPr/>
+        </p:nvSpPr>
+        <p:spPr>
+          <a:xfrm>
+            <a:off x="548640" y="4846320"/>
+            <a:ext cx="2743200" cy="1280160"/>
+          </a:xfrm>
+          <a:prstGeom prst="roundRect">
+            <a:avLst>
+              <a:gd name="adj" fmla="val 7143"/>
+            </a:avLst>
+          </a:prstGeom>
+          <a:solidFill>
+            <a:srgbClr val="FFFFFF">
+              <a:alpha val="85000"/>
+            </a:srgbClr>
+          </a:solidFill>
+          <a:ln/>
+        </p:spPr>
+        <p:txBody>
+          <a:bodyPr/>
+          <a:p/>
+        </p:txBody>
+      </p:sp>
+      <p:sp>
+        <p:nvSpPr>
+          <p:cNvPr id="7" name="Text 5"/>
+          <p:cNvSpPr/>
+          <p:nvPr/>
+        </p:nvSpPr>
+        <p:spPr>
+          <a:xfrm>
+            <a:off x="548640" y="4846320"/>
+            <a:ext cx="2743200" cy="1280160"/>
+          </a:xfrm>
+          <a:prstGeom prst="rect">
+            <a:avLst/>
+          </a:prstGeom>
+          <a:noFill/>
+          <a:ln/>
+        </p:spPr>
+        <p:txBody>
+          <a:bodyPr wrap="square" rtlCol="0" anchor="ctr"/>
+          <a:lstStyle/>
+          <a:p>
+            <a:pPr algn="ctr" indent="0" marL="0">
+              <a:buNone/>
+            </a:pPr>
+            <a:r>
+              <a:rPr lang="en-US" sz="1600" b="1" dirty="0">
+                <a:solidFill>
+                  <a:srgbClr val="2B2B2B"/>
+                </a:solidFill>
+              </a:rPr>
+              <a:t>30. HAFTA</a:t>
+            </a:r>
+            <a:endParaRPr lang="en-US" sz="1600" dirty="0"/>
+          </a:p>
+          <a:p>
+            <a:pPr algn="ctr" indent="0" marL="0">
+              <a:buNone/>
+            </a:pPr>
+            <a:r>
+              <a:rPr lang="en-US" sz="1600" b="1" dirty="0">
+                <a:solidFill>
+                  <a:srgbClr val="2B2B2B"/>
+                </a:solidFill>
+              </a:rPr>
+              <a:t>24 – 28 Mayıs</a:t>
+            </a:r>
+            <a:endParaRPr lang="en-US" sz="1600" dirty="0"/>
+          </a:p>
+        </p:txBody>
+      </p:sp>
+      <p:sp>
+        <p:nvSpPr>
+          <p:cNvPr id="8" name="Text 6"/>
+          <p:cNvSpPr/>
+          <p:nvPr/>
+        </p:nvSpPr>
+        <p:spPr>
+          <a:xfrm>
+            <a:off x="4206240" y="457200"/>
+            <a:ext cx="7498080" cy="1188720"/>
+          </a:xfrm>
+          <a:prstGeom prst="rect">
+            <a:avLst/>
+          </a:prstGeom>
+          <a:noFill/>
+          <a:ln/>
+        </p:spPr>
+        <p:txBody>
+          <a:bodyPr wrap="square" rtlCol="0" anchor="ctr"/>
+          <a:lstStyle/>
+          <a:p>
+            <a:pPr indent="0" marL="0">
+              <a:buNone/>
+            </a:pPr>
+            <a:r>
+              <a:rPr lang="en-US" sz="2200" b="1" i="1" dirty="0">
+                <a:solidFill>
+                  <a:srgbClr val="2F3C7E"/>
+                </a:solidFill>
+                <a:latin typeface="Cambria" pitchFamily="34" charset="0"/>
+                <a:ea typeface="Cambria" pitchFamily="34" charset="-122"/>
+                <a:cs typeface="Cambria" pitchFamily="34" charset="-120"/>
+              </a:rPr>
+              <a:t>"Başarmak güzeldir, bunu alçakgönüllülükle paylaşmak daha güzeldir."</a:t>
+            </a:r>
+            <a:endParaRPr lang="en-US" sz="2200" dirty="0"/>
+          </a:p>
+        </p:txBody>
+      </p:sp>
+      <p:sp>
+        <p:nvSpPr>
+          <p:cNvPr id="9" name="Text 7"/>
+          <p:cNvSpPr/>
+          <p:nvPr/>
+        </p:nvSpPr>
+        <p:spPr>
+          <a:xfrm>
+            <a:off x="4206240" y="1828800"/>
+            <a:ext cx="7498080" cy="4389120"/>
+          </a:xfrm>
+          <a:prstGeom prst="rect">
+            <a:avLst/>
+          </a:prstGeom>
+          <a:noFill/>
+          <a:ln/>
+        </p:spPr>
+        <p:txBody>
+          <a:bodyPr wrap="square" rtlCol="0" anchor="ctr"/>
+          <a:lstStyle/>
+          <a:p>
+            <a:pPr marL="342900" indent="-342900">
+              <a:spcAft>
+                <a:spcPts val="1200"/>
+              </a:spcAft>
+              <a:buSzPct val="100000"/>
+              <a:buChar char="•"/>
+            </a:pPr>
+            <a:r>
+              <a:rPr lang="en-US" sz="1700" dirty="0">
+                <a:solidFill>
+                  <a:srgbClr val="2B2B2B"/>
+                </a:solidFill>
+              </a:rPr>
+              <a:t>Başarılarımızı övünmeden paylaşırız.</a:t>
+            </a:r>
+            <a:endParaRPr lang="en-US" sz="1700" dirty="0"/>
+          </a:p>
+          <a:p>
+            <a:pPr marL="342900" indent="-342900">
+              <a:spcAft>
+                <a:spcPts val="1200"/>
+              </a:spcAft>
+              <a:buSzPct val="100000"/>
+              <a:buChar char="•"/>
+            </a:pPr>
+            <a:r>
+              <a:rPr lang="en-US" sz="1700" dirty="0">
+                <a:solidFill>
+                  <a:srgbClr val="2B2B2B"/>
+                </a:solidFill>
+              </a:rPr>
+              <a:t>Başkalarının emeğini de takdir ederiz.</a:t>
+            </a:r>
+            <a:endParaRPr lang="en-US" sz="1700" dirty="0"/>
+          </a:p>
+          <a:p>
+            <a:pPr marL="342900" indent="-342900">
+              <a:spcAft>
+                <a:spcPts val="1200"/>
+              </a:spcAft>
+              <a:buSzPct val="100000"/>
+              <a:buChar char="•"/>
+            </a:pPr>
+            <a:r>
+              <a:rPr lang="en-US" sz="1700" dirty="0">
+                <a:solidFill>
+                  <a:srgbClr val="2B2B2B"/>
+                </a:solidFill>
+              </a:rPr>
+              <a:t>Mütevazılık, kendimizi küçük görmek değil saygılı olmaktır.</a:t>
+            </a:r>
+            <a:endParaRPr lang="en-US" sz="1700" dirty="0"/>
+          </a:p>
+          <a:p>
+            <a:pPr marL="342900" indent="-342900">
+              <a:spcAft>
+                <a:spcPts val="1200"/>
+              </a:spcAft>
+              <a:buSzPct val="100000"/>
+              <a:buChar char="•"/>
+            </a:pPr>
+            <a:r>
+              <a:rPr lang="en-US" sz="1700" dirty="0">
+                <a:solidFill>
+                  <a:srgbClr val="2B2B2B"/>
+                </a:solidFill>
+              </a:rPr>
+              <a:t>Herkesin bir değeri olduğunu unutmayız.</a:t>
             </a:r>
             <a:endParaRPr lang="en-US" sz="1700" dirty="0"/>
           </a:p>
@@ -2141,7 +2165,7 @@
                   <a:srgbClr val="F9E795"/>
                 </a:solidFill>
               </a:rPr>
-              <a:t>AİLE BÜTÜNLÜĞÜ • MAHREMİYET</a:t>
+              <a:t>ESTETİK • MÜTEVAZILIK</a:t>
             </a:r>
             <a:endParaRPr lang="en-US" sz="2200" dirty="0"/>
           </a:p>
